--- a/Slide_Kleber_Vicente_Editavel.pptx
+++ b/Slide_Kleber_Vicente_Editavel.pptx
@@ -503,12 +503,12 @@
           <a:lstStyle/>
           <a:p>
             <a:r>
-              <a:t>Template NeuralMind.AI com fundo fiel ao HTML/CSS e textos editáveis.</a:t>
-            </a:r>
-          </a:p>
-          <a:p>
-            <a:r>
-              <a:t>Para máxima fidelidade no PowerPoint, instale a família NeuralMind Sans Square.</a:t>
+              <a:t>Template NeuralMind.ai com fundo fiel ao HTML/CSS e textos editáveis.</a:t>
+            </a:r>
+          </a:p>
+          <a:p>
+            <a:r>
+              <a:t>Para máxima fidelidade no PowerPoint, instale as famílias Outfit e Urbanist.</a:t>
             </a:r>
           </a:p>
         </p:txBody>
@@ -578,12 +578,12 @@
           <a:lstStyle/>
           <a:p>
             <a:r>
-              <a:t>Template NeuralMind.AI com fundo fiel ao HTML/CSS e textos editáveis.</a:t>
-            </a:r>
-          </a:p>
-          <a:p>
-            <a:r>
-              <a:t>Para máxima fidelidade no PowerPoint, instale a família NeuralMind Sans Square.</a:t>
+              <a:t>Template NeuralMind.ai com fundo fiel ao HTML/CSS e textos editáveis.</a:t>
+            </a:r>
+          </a:p>
+          <a:p>
+            <a:r>
+              <a:t>Para máxima fidelidade no PowerPoint, instale as famílias Outfit e Urbanist.</a:t>
             </a:r>
           </a:p>
         </p:txBody>
@@ -3648,7 +3648,7 @@
                 <a:solidFill>
                   <a:srgbClr val="EF476F"/>
                 </a:solidFill>
-                <a:latin typeface="NeuralMind Sans Square"/>
+                <a:latin typeface="Outfit"/>
               </a:rPr>
               <a:t>ENCERRAMENTO</a:t>
             </a:r>
@@ -3691,7 +3691,7 @@
                 <a:solidFill>
                   <a:srgbClr val="FFFFFC"/>
                 </a:solidFill>
-                <a:latin typeface="NeuralMind Sans Square"/>
+                <a:latin typeface="Outfit"/>
               </a:rPr>
               <a:t>Obrigado.</a:t>
             </a:r>
@@ -3734,7 +3734,7 @@
                 <a:solidFill>
                   <a:srgbClr val="FFFFFC"/>
                 </a:solidFill>
-                <a:latin typeface="NeuralMind Sans Square"/>
+                <a:latin typeface="Outfit"/>
               </a:rPr>
               <a:t>Kleber Edurado Vicente dos Santos</a:t>
             </a:r>
@@ -3777,7 +3777,7 @@
                 <a:solidFill>
                   <a:srgbClr val="C8C0CD"/>
                 </a:solidFill>
-                <a:latin typeface="NeuralMind Sans Square"/>
+                <a:latin typeface="Outfit"/>
               </a:rPr>
               <a:t>Head de Inovação, Produtos e</a:t>
             </a:r>
@@ -3797,7 +3797,7 @@
                 <a:solidFill>
                   <a:srgbClr val="C8C0CD"/>
                 </a:solidFill>
-                <a:latin typeface="NeuralMind Sans Square"/>
+                <a:latin typeface="Outfit"/>
               </a:rPr>
               <a:t>Desenvolvimento de Negócios</a:t>
             </a:r>
@@ -3840,7 +3840,7 @@
                 <a:solidFill>
                   <a:srgbClr val="EF476F"/>
                 </a:solidFill>
-                <a:latin typeface="NeuralMind Sans Square"/>
+                <a:latin typeface="Outfit"/>
               </a:rPr>
               <a:t>E-MAIL</a:t>
             </a:r>
@@ -3883,7 +3883,7 @@
                 <a:solidFill>
                   <a:srgbClr val="FFFFFC"/>
                 </a:solidFill>
-                <a:latin typeface="NeuralMind Sans Square"/>
+                <a:latin typeface="Outfit"/>
               </a:rPr>
               <a:t>nome@empresa.com</a:t>
             </a:r>
@@ -3926,7 +3926,7 @@
                 <a:solidFill>
                   <a:srgbClr val="EF476F"/>
                 </a:solidFill>
-                <a:latin typeface="NeuralMind Sans Square"/>
+                <a:latin typeface="Outfit"/>
               </a:rPr>
               <a:t>TELEFONE</a:t>
             </a:r>
@@ -3969,7 +3969,7 @@
                 <a:solidFill>
                   <a:srgbClr val="FFFFFC"/>
                 </a:solidFill>
-                <a:latin typeface="NeuralMind Sans Square"/>
+                <a:latin typeface="Outfit"/>
               </a:rPr>
               <a:t>+55 00 00000-0000</a:t>
             </a:r>
@@ -4054,7 +4054,7 @@
                 <a:solidFill>
                   <a:srgbClr val="290241"/>
                 </a:solidFill>
-                <a:latin typeface="NeuralMind Sans Square"/>
+                <a:latin typeface="Outfit"/>
               </a:rPr>
               <a:t>ENCERRAMENTO</a:t>
             </a:r>
@@ -4097,7 +4097,7 @@
                 <a:solidFill>
                   <a:srgbClr val="0F1108"/>
                 </a:solidFill>
-                <a:latin typeface="NeuralMind Sans Square"/>
+                <a:latin typeface="Outfit"/>
               </a:rPr>
               <a:t>Obrigado.</a:t>
             </a:r>
@@ -4140,7 +4140,7 @@
                 <a:solidFill>
                   <a:srgbClr val="625E63"/>
                 </a:solidFill>
-                <a:latin typeface="NeuralMind Sans Square"/>
+                <a:latin typeface="Outfit"/>
               </a:rPr>
               <a:t>Fico à disposição para continuarmos esta conversa.</a:t>
             </a:r>
@@ -4183,7 +4183,7 @@
                 <a:solidFill>
                   <a:srgbClr val="EF476F"/>
                 </a:solidFill>
-                <a:latin typeface="NeuralMind Sans Square"/>
+                <a:latin typeface="Outfit"/>
               </a:rPr>
               <a:t>E-MAIL</a:t>
             </a:r>
@@ -4226,7 +4226,7 @@
                 <a:solidFill>
                   <a:srgbClr val="0F1108"/>
                 </a:solidFill>
-                <a:latin typeface="NeuralMind Sans Square"/>
+                <a:latin typeface="Outfit"/>
               </a:rPr>
               <a:t>nome@empresa.com</a:t>
             </a:r>
@@ -4269,7 +4269,7 @@
                 <a:solidFill>
                   <a:srgbClr val="EF476F"/>
                 </a:solidFill>
-                <a:latin typeface="NeuralMind Sans Square"/>
+                <a:latin typeface="Outfit"/>
               </a:rPr>
               <a:t>TELEFONE</a:t>
             </a:r>
@@ -4312,7 +4312,7 @@
                 <a:solidFill>
                   <a:srgbClr val="0F1108"/>
                 </a:solidFill>
-                <a:latin typeface="NeuralMind Sans Square"/>
+                <a:latin typeface="Outfit"/>
               </a:rPr>
               <a:t>+55 00 00000-0000</a:t>
             </a:r>
@@ -4355,7 +4355,7 @@
                 <a:solidFill>
                   <a:srgbClr val="FFFFFC"/>
                 </a:solidFill>
-                <a:latin typeface="NeuralMind Sans Square"/>
+                <a:latin typeface="Outfit"/>
               </a:rPr>
               <a:t>Kleber Edurado</a:t>
             </a:r>
@@ -4375,7 +4375,7 @@
                 <a:solidFill>
                   <a:srgbClr val="FFFFFC"/>
                 </a:solidFill>
-                <a:latin typeface="NeuralMind Sans Square"/>
+                <a:latin typeface="Outfit"/>
               </a:rPr>
               <a:t>Vicente dos Santos</a:t>
             </a:r>
@@ -4418,7 +4418,7 @@
                 <a:solidFill>
                   <a:srgbClr val="EF476F"/>
                 </a:solidFill>
-                <a:latin typeface="NeuralMind Sans Square"/>
+                <a:latin typeface="Outfit"/>
               </a:rPr>
               <a:t>Head de Inovação, Produtos e</a:t>
             </a:r>
@@ -4438,7 +4438,7 @@
                 <a:solidFill>
                   <a:srgbClr val="EF476F"/>
                 </a:solidFill>
-                <a:latin typeface="NeuralMind Sans Square"/>
+                <a:latin typeface="Outfit"/>
               </a:rPr>
               <a:t>Desenvolvimento de Negócios</a:t>
             </a:r>
